--- a/Miercoles-10/S01_Miercoles-10_2_Post_Abogados-reales-no-chatbots_4x5.pptx
+++ b/Miercoles-10/S01_Miercoles-10_2_Post_Abogados-reales-no-chatbots_4x5.pptx
@@ -3098,7 +3098,7 @@
       <p:grpSpPr/>
       <p:pic>
         <p:nvPicPr>
-          <p:cNvPr id="2" name="Picture 1" descr="textura.png"/>
+          <p:cNvPr id="2" name="Picture 1" descr="phone.png"/>
           <p:cNvPicPr>
             <a:picLocks noChangeAspect="1"/>
           </p:cNvPicPr>
@@ -3112,8 +3112,8 @@
         </p:blipFill>
         <p:spPr>
           <a:xfrm>
-            <a:off x="0" y="-367392"/>
-            <a:ext cx="8229600" cy="11021785"/>
+            <a:off x="0" y="-2228850"/>
+            <a:ext cx="8229600" cy="14744700"/>
           </a:xfrm>
           <a:prstGeom prst="rect">
             <a:avLst/>
@@ -3285,7 +3285,7 @@
         </p:nvSpPr>
         <p:spPr>
           <a:xfrm>
-            <a:off x="777240" y="1594548"/>
+            <a:off x="777240" y="1753298"/>
             <a:ext cx="1371600" cy="146304"/>
           </a:xfrm>
           <a:prstGeom prst="rect">
@@ -3329,8 +3329,8 @@
         </p:nvSpPr>
         <p:spPr>
           <a:xfrm>
-            <a:off x="777240" y="2051748"/>
-            <a:ext cx="6675120" cy="5451983"/>
+            <a:off x="777240" y="2210498"/>
+            <a:ext cx="6675120" cy="5134483"/>
           </a:xfrm>
           <a:prstGeom prst="rect">
             <a:avLst/>
@@ -3349,7 +3349,7 @@
               </a:lnSpc>
             </a:pPr>
             <a:r>
-              <a:rPr sz="6500" b="1">
+              <a:rPr sz="6100" b="1">
                 <a:solidFill>
                   <a:srgbClr val="7C3AED"/>
                 </a:solidFill>
@@ -3358,7 +3358,7 @@
               <a:t>No chatbots.</a:t>
             </a:r>
             <a:r>
-              <a:rPr sz="6500" b="1">
+              <a:rPr sz="6100" b="1">
                 <a:solidFill>
                   <a:srgbClr val="FFFFFF"/>
                 </a:solidFill>
@@ -3372,6 +3372,45 @@
       <p:sp>
         <p:nvSpPr>
           <p:cNvPr id="8" name="TextBox 7"/>
+          <p:cNvSpPr txBox="1"/>
+          <p:nvPr/>
+        </p:nvSpPr>
+        <p:spPr>
+          <a:xfrm>
+            <a:off x="777240" y="7344981"/>
+            <a:ext cx="6675120" cy="1530858"/>
+          </a:xfrm>
+          <a:prstGeom prst="rect">
+            <a:avLst/>
+          </a:prstGeom>
+          <a:noFill/>
+        </p:spPr>
+        <p:txBody>
+          <a:bodyPr wrap="square" anchor="t" lIns="0" rIns="0" tIns="0" bIns="0">
+            <a:spAutoFit/>
+          </a:bodyPr>
+          <a:lstStyle/>
+          <a:p>
+            <a:pPr algn="l">
+              <a:lnSpc>
+                <a:spcPct val="110000"/>
+              </a:lnSpc>
+            </a:pPr>
+            <a:r>
+              <a:rPr sz="2600" b="0">
+                <a:solidFill>
+                  <a:srgbClr val="FFFFFF"/>
+                </a:solidFill>
+                <a:latin typeface="Inter"/>
+              </a:rPr>
+              <a:t>Habla por videollamada en notaly.com.ve</a:t>
+            </a:r>
+          </a:p>
+        </p:txBody>
+      </p:sp>
+      <p:sp>
+        <p:nvSpPr>
+          <p:cNvPr id="9" name="TextBox 8"/>
           <p:cNvSpPr txBox="1"/>
           <p:nvPr/>
         </p:nvSpPr>

--- a/Miercoles-10/S01_Miercoles-10_2_Post_Abogados-reales-no-chatbots_4x5.pptx
+++ b/Miercoles-10/S01_Miercoles-10_2_Post_Abogados-reales-no-chatbots_4x5.pptx
@@ -3403,7 +3403,7 @@
                 </a:solidFill>
                 <a:latin typeface="Inter"/>
               </a:rPr>
-              <a:t>Habla por videollamada en notaly.com.ve</a:t>
+              <a:t>Habla por videollamada. notaly.com.ve</a:t>
             </a:r>
           </a:p>
         </p:txBody>
